--- a/privacy/paper_min-k/doc/AAAI-Poster.pptx
+++ b/privacy/paper_min-k/doc/AAAI-Poster.pptx
@@ -246,7 +246,7 @@
           <a:p>
             <a:fld id="{1C5565DA-1A89-D346-B05F-3D6C1EA5130B}" type="datetimeFigureOut">
               <a:rPr lang="en-US" smtClean="0"/>
-              <a:t>12/18/25</a:t>
+              <a:t>1/14/26</a:t>
             </a:fld>
             <a:endParaRPr lang="en-US"/>
           </a:p>
@@ -411,7 +411,7 @@
           <a:p>
             <a:fld id="{1C5565DA-1A89-D346-B05F-3D6C1EA5130B}" type="datetimeFigureOut">
               <a:rPr lang="en-US" smtClean="0"/>
-              <a:t>12/18/25</a:t>
+              <a:t>1/14/26</a:t>
             </a:fld>
             <a:endParaRPr lang="en-US"/>
           </a:p>
@@ -586,7 +586,7 @@
           <a:p>
             <a:fld id="{1C5565DA-1A89-D346-B05F-3D6C1EA5130B}" type="datetimeFigureOut">
               <a:rPr lang="en-US" smtClean="0"/>
-              <a:t>12/18/25</a:t>
+              <a:t>1/14/26</a:t>
             </a:fld>
             <a:endParaRPr lang="en-US"/>
           </a:p>
@@ -751,7 +751,7 @@
           <a:p>
             <a:fld id="{1C5565DA-1A89-D346-B05F-3D6C1EA5130B}" type="datetimeFigureOut">
               <a:rPr lang="en-US" smtClean="0"/>
-              <a:t>12/18/25</a:t>
+              <a:t>1/14/26</a:t>
             </a:fld>
             <a:endParaRPr lang="en-US"/>
           </a:p>
@@ -990,7 +990,7 @@
           <a:p>
             <a:fld id="{1C5565DA-1A89-D346-B05F-3D6C1EA5130B}" type="datetimeFigureOut">
               <a:rPr lang="en-US" smtClean="0"/>
-              <a:t>12/18/25</a:t>
+              <a:t>1/14/26</a:t>
             </a:fld>
             <a:endParaRPr lang="en-US"/>
           </a:p>
@@ -1217,7 +1217,7 @@
           <a:p>
             <a:fld id="{1C5565DA-1A89-D346-B05F-3D6C1EA5130B}" type="datetimeFigureOut">
               <a:rPr lang="en-US" smtClean="0"/>
-              <a:t>12/18/25</a:t>
+              <a:t>1/14/26</a:t>
             </a:fld>
             <a:endParaRPr lang="en-US"/>
           </a:p>
@@ -1579,7 +1579,7 @@
           <a:p>
             <a:fld id="{1C5565DA-1A89-D346-B05F-3D6C1EA5130B}" type="datetimeFigureOut">
               <a:rPr lang="en-US" smtClean="0"/>
-              <a:t>12/18/25</a:t>
+              <a:t>1/14/26</a:t>
             </a:fld>
             <a:endParaRPr lang="en-US"/>
           </a:p>
@@ -1692,7 +1692,7 @@
           <a:p>
             <a:fld id="{1C5565DA-1A89-D346-B05F-3D6C1EA5130B}" type="datetimeFigureOut">
               <a:rPr lang="en-US" smtClean="0"/>
-              <a:t>12/18/25</a:t>
+              <a:t>1/14/26</a:t>
             </a:fld>
             <a:endParaRPr lang="en-US"/>
           </a:p>
@@ -1782,7 +1782,7 @@
           <a:p>
             <a:fld id="{1C5565DA-1A89-D346-B05F-3D6C1EA5130B}" type="datetimeFigureOut">
               <a:rPr lang="en-US" smtClean="0"/>
-              <a:t>12/18/25</a:t>
+              <a:t>1/14/26</a:t>
             </a:fld>
             <a:endParaRPr lang="en-US"/>
           </a:p>
@@ -2054,7 +2054,7 @@
           <a:p>
             <a:fld id="{1C5565DA-1A89-D346-B05F-3D6C1EA5130B}" type="datetimeFigureOut">
               <a:rPr lang="en-US" smtClean="0"/>
-              <a:t>12/18/25</a:t>
+              <a:t>1/14/26</a:t>
             </a:fld>
             <a:endParaRPr lang="en-US"/>
           </a:p>
@@ -2306,7 +2306,7 @@
           <a:p>
             <a:fld id="{1C5565DA-1A89-D346-B05F-3D6C1EA5130B}" type="datetimeFigureOut">
               <a:rPr lang="en-US" smtClean="0"/>
-              <a:t>12/18/25</a:t>
+              <a:t>1/14/26</a:t>
             </a:fld>
             <a:endParaRPr lang="en-US"/>
           </a:p>
@@ -2514,7 +2514,7 @@
           <a:p>
             <a:fld id="{1C5565DA-1A89-D346-B05F-3D6C1EA5130B}" type="datetimeFigureOut">
               <a:rPr lang="en-US" smtClean="0"/>
-              <a:t>12/18/25</a:t>
+              <a:t>1/14/26</a:t>
             </a:fld>
             <a:endParaRPr lang="en-US"/>
           </a:p>
@@ -3484,7 +3484,7 @@
         </p:blipFill>
         <p:spPr>
           <a:xfrm>
-            <a:off x="24736928" y="2885585"/>
+            <a:off x="24736928" y="2199788"/>
             <a:ext cx="4754101" cy="1351397"/>
           </a:xfrm>
           <a:prstGeom prst="rect">
@@ -3511,7 +3511,7 @@
         </p:blipFill>
         <p:spPr>
           <a:xfrm>
-            <a:off x="24550777" y="682091"/>
+            <a:off x="24550777" y="-3706"/>
             <a:ext cx="5105869" cy="1610744"/>
           </a:xfrm>
           <a:prstGeom prst="rect">
@@ -5327,6 +5327,85 @@
           </a:prstGeom>
         </p:spPr>
       </p:pic>
+      <p:sp>
+        <p:nvSpPr>
+          <p:cNvPr id="2" name="TextBox 1">
+            <a:extLst>
+              <a:ext uri="{FF2B5EF4-FFF2-40B4-BE49-F238E27FC236}">
+                <a16:creationId xmlns:a16="http://schemas.microsoft.com/office/drawing/2014/main" id="{82CD29C0-AFDF-0545-B39B-1DBB970D0BF5}"/>
+              </a:ext>
+            </a:extLst>
+          </p:cNvPr>
+          <p:cNvSpPr txBox="1"/>
+          <p:nvPr/>
+        </p:nvSpPr>
+        <p:spPr>
+          <a:xfrm>
+            <a:off x="24744890" y="3819754"/>
+            <a:ext cx="4566014" cy="1569660"/>
+          </a:xfrm>
+          <a:prstGeom prst="rect">
+            <a:avLst/>
+          </a:prstGeom>
+          <a:noFill/>
+        </p:spPr>
+        <p:txBody>
+          <a:bodyPr wrap="square" rtlCol="0">
+            <a:spAutoFit/>
+          </a:bodyPr>
+          <a:lstStyle/>
+          <a:p>
+            <a:r>
+              <a:rPr lang="en-CN" sz="3200" b="1" dirty="0">
+                <a:solidFill>
+                  <a:schemeClr val="bg1"/>
+                </a:solidFill>
+              </a:rPr>
+              <a:t>Contacts</a:t>
+            </a:r>
+          </a:p>
+          <a:p>
+            <a:r>
+              <a:rPr lang="en-CN" sz="3200" dirty="0">
+                <a:solidFill>
+                  <a:schemeClr val="bg1"/>
+                </a:solidFill>
+                <a:hlinkClick r:id="rId11">
+                  <a:extLst>
+                    <a:ext uri="{A12FA001-AC4F-418D-AE19-62706E023703}">
+                      <ahyp:hlinkClr xmlns:ahyp="http://schemas.microsoft.com/office/drawing/2018/hyperlinkcolor" val="tx"/>
+                    </a:ext>
+                  </a:extLst>
+                </a:hlinkClick>
+              </a:rPr>
+              <a:t>kaifengh@tongji.edu.cn</a:t>
+            </a:r>
+            <a:endParaRPr lang="en-CN" sz="3200" dirty="0">
+              <a:solidFill>
+                <a:schemeClr val="bg1"/>
+              </a:solidFill>
+            </a:endParaRPr>
+          </a:p>
+          <a:p>
+            <a:r>
+              <a:rPr lang="en-GB" sz="3200" dirty="0">
+                <a:solidFill>
+                  <a:schemeClr val="bg1"/>
+                </a:solidFill>
+              </a:rPr>
+              <a:t>k</a:t>
+            </a:r>
+            <a:r>
+              <a:rPr lang="en-CN" sz="3200" dirty="0">
+                <a:solidFill>
+                  <a:schemeClr val="bg1"/>
+                </a:solidFill>
+              </a:rPr>
+              <a:t>aifeng-h (Wechat)</a:t>
+            </a:r>
+          </a:p>
+        </p:txBody>
+      </p:sp>
     </p:spTree>
   </p:cSld>
   <p:clrMapOvr>
